--- a/BAOR_Matching_System_Proposal.pptx
+++ b/BAOR_Matching_System_Proposal.pptx
@@ -14,13 +14,13 @@
     <p:sldId id="259" r:id="rId5"/>
     <p:sldId id="260" r:id="rId6"/>
     <p:sldId id="261" r:id="rId7"/>
-    <p:sldId id="262" r:id="rId8"/>
-    <p:sldId id="263" r:id="rId9"/>
-    <p:sldId id="264" r:id="rId10"/>
-    <p:sldId id="265" r:id="rId11"/>
-    <p:sldId id="266" r:id="rId12"/>
-    <p:sldId id="267" r:id="rId13"/>
-    <p:sldId id="268" r:id="rId14"/>
+    <p:sldId id="263" r:id="rId8"/>
+    <p:sldId id="264" r:id="rId9"/>
+    <p:sldId id="270" r:id="rId10"/>
+    <p:sldId id="271" r:id="rId11"/>
+    <p:sldId id="265" r:id="rId12"/>
+    <p:sldId id="266" r:id="rId13"/>
+    <p:sldId id="267" r:id="rId14"/>
     <p:sldId id="269" r:id="rId15"/>
   </p:sldIdLst>
   <p:sldSz cx="9144000" cy="5143500" type="screen16x9"/>
@@ -339,7 +339,13 @@
   <p:cSld>
     <p:spTree>
       <p:nvGrpSpPr>
-        <p:cNvPr id="1" name=""/>
+        <p:cNvPr id="1" name="">
+          <a:extLst>
+            <a:ext uri="{FF2B5EF4-FFF2-40B4-BE49-F238E27FC236}">
+              <a16:creationId xmlns:a16="http://schemas.microsoft.com/office/drawing/2014/main" id="{DD1CA3E5-AD74-562D-E619-2E22335E2C7A}"/>
+            </a:ext>
+          </a:extLst>
+        </p:cNvPr>
         <p:cNvGrpSpPr/>
         <p:nvPr/>
       </p:nvGrpSpPr>
@@ -353,7 +359,13 @@
       </p:grpSpPr>
       <p:sp>
         <p:nvSpPr>
-          <p:cNvPr id="2" name="Slide Image Placeholder 1"/>
+          <p:cNvPr id="2" name="Slide Image Placeholder 1">
+            <a:extLst>
+              <a:ext uri="{FF2B5EF4-FFF2-40B4-BE49-F238E27FC236}">
+                <a16:creationId xmlns:a16="http://schemas.microsoft.com/office/drawing/2014/main" id="{AA032703-134C-5994-6CC1-CC49026B5854}"/>
+              </a:ext>
+            </a:extLst>
+          </p:cNvPr>
           <p:cNvSpPr>
             <a:spLocks noGrp="1" noRot="1" noChangeAspect="1"/>
           </p:cNvSpPr>
@@ -365,7 +377,13 @@
       </p:sp>
       <p:sp>
         <p:nvSpPr>
-          <p:cNvPr id="3" name="Notes Placeholder 2"/>
+          <p:cNvPr id="3" name="Notes Placeholder 2">
+            <a:extLst>
+              <a:ext uri="{FF2B5EF4-FFF2-40B4-BE49-F238E27FC236}">
+                <a16:creationId xmlns:a16="http://schemas.microsoft.com/office/drawing/2014/main" id="{313B98C5-4FFA-DEBE-DD20-7AE36A8D5A60}"/>
+              </a:ext>
+            </a:extLst>
+          </p:cNvPr>
           <p:cNvSpPr>
             <a:spLocks noGrp="1"/>
           </p:cNvSpPr>
@@ -384,7 +402,13 @@
       </p:sp>
       <p:sp>
         <p:nvSpPr>
-          <p:cNvPr id="4" name="Slide Number Placeholder 3"/>
+          <p:cNvPr id="4" name="Slide Number Placeholder 3">
+            <a:extLst>
+              <a:ext uri="{FF2B5EF4-FFF2-40B4-BE49-F238E27FC236}">
+                <a16:creationId xmlns:a16="http://schemas.microsoft.com/office/drawing/2014/main" id="{EDDDBDE8-31B5-5256-4E31-8BF093A54945}"/>
+              </a:ext>
+            </a:extLst>
+          </p:cNvPr>
           <p:cNvSpPr>
             <a:spLocks noGrp="1"/>
           </p:cNvSpPr>
@@ -408,7 +432,7 @@
     </p:spTree>
     <p:extLst>
       <p:ext uri="{BB962C8B-B14F-4D97-AF65-F5344CB8AC3E}">
-        <p14:creationId xmlns:p14="http://schemas.microsoft.com/office/powerpoint/2010/main" val="1024086991"/>
+        <p14:creationId xmlns:p14="http://schemas.microsoft.com/office/powerpoint/2010/main" val="3043092158"/>
       </p:ext>
     </p:extLst>
   </p:cSld>
@@ -1933,7 +1957,7 @@
                 <a:ea typeface="Playfair Display" pitchFamily="34" charset="-122"/>
                 <a:cs typeface="Playfair Display" pitchFamily="34" charset="-120"/>
               </a:rPr>
-              <a:t>Thesis allocation  ·  early-career matching  ·  career-services analytics</a:t>
+              <a:t>Thesis allocation  ·  Early-career matching  ·  Career-services analytics</a:t>
             </a:r>
             <a:endParaRPr lang="en-US" sz="1700" dirty="0"/>
           </a:p>
@@ -2026,6 +2050,343 @@
 </file>
 
 <file path=ppt/slides/slide10.xml><?xml version="1.0" encoding="utf-8"?>
+<p:sld xmlns:a="http://schemas.openxmlformats.org/drawingml/2006/main" xmlns:r="http://schemas.openxmlformats.org/officeDocument/2006/relationships" xmlns:p="http://schemas.openxmlformats.org/presentationml/2006/main">
+  <p:cSld>
+    <p:bg>
+      <p:bgPr>
+        <a:solidFill>
+          <a:srgbClr val="F7F4EF"/>
+        </a:solidFill>
+        <a:effectLst/>
+      </p:bgPr>
+    </p:bg>
+    <p:spTree>
+      <p:nvGrpSpPr>
+        <p:cNvPr id="1" name="">
+          <a:extLst>
+            <a:ext uri="{FF2B5EF4-FFF2-40B4-BE49-F238E27FC236}">
+              <a16:creationId xmlns:a16="http://schemas.microsoft.com/office/drawing/2014/main" id="{5A98F3BC-41B5-267D-A6E0-5D11EEDC1222}"/>
+            </a:ext>
+          </a:extLst>
+        </p:cNvPr>
+        <p:cNvGrpSpPr/>
+        <p:nvPr/>
+      </p:nvGrpSpPr>
+      <p:grpSpPr>
+        <a:xfrm>
+          <a:off x="0" y="0"/>
+          <a:ext cx="0" cy="0"/>
+          <a:chOff x="0" y="0"/>
+          <a:chExt cx="0" cy="0"/>
+        </a:xfrm>
+      </p:grpSpPr>
+      <p:sp>
+        <p:nvSpPr>
+          <p:cNvPr id="2" name="Shape 0">
+            <a:extLst>
+              <a:ext uri="{FF2B5EF4-FFF2-40B4-BE49-F238E27FC236}">
+                <a16:creationId xmlns:a16="http://schemas.microsoft.com/office/drawing/2014/main" id="{3BE19C2C-CC8D-504C-C045-35738DC2325C}"/>
+              </a:ext>
+            </a:extLst>
+          </p:cNvPr>
+          <p:cNvSpPr/>
+          <p:nvPr/>
+        </p:nvSpPr>
+        <p:spPr>
+          <a:xfrm>
+            <a:off x="457200" y="530352"/>
+            <a:ext cx="73152" cy="73152"/>
+          </a:xfrm>
+          <a:prstGeom prst="ellipse">
+            <a:avLst/>
+          </a:prstGeom>
+          <a:solidFill>
+            <a:srgbClr val="E8622A"/>
+          </a:solidFill>
+          <a:ln w="12700">
+            <a:solidFill>
+              <a:srgbClr val="E8622A"/>
+            </a:solidFill>
+            <a:prstDash val="solid"/>
+          </a:ln>
+        </p:spPr>
+        <p:txBody>
+          <a:bodyPr/>
+          <a:lstStyle/>
+          <a:p>
+            <a:endParaRPr lang="en-US"/>
+          </a:p>
+        </p:txBody>
+      </p:sp>
+      <p:sp>
+        <p:nvSpPr>
+          <p:cNvPr id="3" name="Text 1">
+            <a:extLst>
+              <a:ext uri="{FF2B5EF4-FFF2-40B4-BE49-F238E27FC236}">
+                <a16:creationId xmlns:a16="http://schemas.microsoft.com/office/drawing/2014/main" id="{8FCF8D5D-8BE1-5807-078B-193287459F9F}"/>
+              </a:ext>
+            </a:extLst>
+          </p:cNvPr>
+          <p:cNvSpPr/>
+          <p:nvPr/>
+        </p:nvSpPr>
+        <p:spPr>
+          <a:xfrm>
+            <a:off x="658368" y="457200"/>
+            <a:ext cx="4572000" cy="274320"/>
+          </a:xfrm>
+          <a:prstGeom prst="rect">
+            <a:avLst/>
+          </a:prstGeom>
+          <a:noFill/>
+          <a:ln/>
+        </p:spPr>
+        <p:txBody>
+          <a:bodyPr wrap="square" lIns="0" tIns="0" rIns="0" bIns="0" rtlCol="0" anchor="ctr"/>
+          <a:lstStyle/>
+          <a:p>
+            <a:pPr marL="0" indent="0">
+              <a:buNone/>
+            </a:pPr>
+            <a:r>
+              <a:rPr lang="en-US" sz="900" b="1" kern="0" spc="500" dirty="0">
+                <a:solidFill>
+                  <a:srgbClr val="8A8F9E"/>
+                </a:solidFill>
+                <a:latin typeface="DM Sans" pitchFamily="34" charset="0"/>
+                <a:ea typeface="DM Sans" pitchFamily="34" charset="-122"/>
+                <a:cs typeface="DM Sans" pitchFamily="34" charset="-120"/>
+              </a:rPr>
+              <a:t>09  ·  LIVE DEMO</a:t>
+            </a:r>
+            <a:endParaRPr lang="en-US" sz="900" dirty="0"/>
+          </a:p>
+        </p:txBody>
+      </p:sp>
+      <p:sp>
+        <p:nvSpPr>
+          <p:cNvPr id="4" name="Text 2">
+            <a:extLst>
+              <a:ext uri="{FF2B5EF4-FFF2-40B4-BE49-F238E27FC236}">
+                <a16:creationId xmlns:a16="http://schemas.microsoft.com/office/drawing/2014/main" id="{222BDE00-E2D6-9E12-BFF6-2F2224495AF1}"/>
+              </a:ext>
+            </a:extLst>
+          </p:cNvPr>
+          <p:cNvSpPr/>
+          <p:nvPr/>
+        </p:nvSpPr>
+        <p:spPr>
+          <a:xfrm>
+            <a:off x="457200" y="664752"/>
+            <a:ext cx="8229600" cy="640080"/>
+          </a:xfrm>
+          <a:prstGeom prst="rect">
+            <a:avLst/>
+          </a:prstGeom>
+          <a:noFill/>
+          <a:ln/>
+        </p:spPr>
+        <p:txBody>
+          <a:bodyPr wrap="square" lIns="0" tIns="0" rIns="0" bIns="0" rtlCol="0" anchor="ctr"/>
+          <a:lstStyle/>
+          <a:p>
+            <a:pPr marL="0" indent="0">
+              <a:buNone/>
+            </a:pPr>
+            <a:r>
+              <a:rPr lang="en-US" sz="3000" dirty="0">
+                <a:solidFill>
+                  <a:srgbClr val="0F1F3D"/>
+                </a:solidFill>
+                <a:latin typeface="Playfair Display" pitchFamily="34" charset="0"/>
+                <a:ea typeface="Playfair Display" pitchFamily="34" charset="-122"/>
+                <a:cs typeface="Playfair Display" pitchFamily="34" charset="-120"/>
+              </a:rPr>
+              <a:t>Built, not (only) pitched.</a:t>
+            </a:r>
+            <a:endParaRPr lang="en-US" sz="3000" dirty="0"/>
+          </a:p>
+        </p:txBody>
+      </p:sp>
+      <p:sp>
+        <p:nvSpPr>
+          <p:cNvPr id="11" name="Text 7">
+            <a:extLst>
+              <a:ext uri="{FF2B5EF4-FFF2-40B4-BE49-F238E27FC236}">
+                <a16:creationId xmlns:a16="http://schemas.microsoft.com/office/drawing/2014/main" id="{659AACAC-C2A7-9584-9431-9D711F05B4BD}"/>
+              </a:ext>
+            </a:extLst>
+          </p:cNvPr>
+          <p:cNvSpPr/>
+          <p:nvPr/>
+        </p:nvSpPr>
+        <p:spPr>
+          <a:xfrm>
+            <a:off x="457200" y="4777740"/>
+            <a:ext cx="3657600" cy="228600"/>
+          </a:xfrm>
+          <a:prstGeom prst="rect">
+            <a:avLst/>
+          </a:prstGeom>
+          <a:noFill/>
+          <a:ln/>
+        </p:spPr>
+        <p:txBody>
+          <a:bodyPr wrap="square" lIns="0" tIns="0" rIns="0" bIns="0" rtlCol="0" anchor="ctr"/>
+          <a:lstStyle/>
+          <a:p>
+            <a:pPr marL="0" indent="0" algn="l">
+              <a:buNone/>
+            </a:pPr>
+            <a:r>
+              <a:rPr lang="en-US" sz="800" kern="0" spc="300" dirty="0">
+                <a:solidFill>
+                  <a:srgbClr val="8A8F9E"/>
+                </a:solidFill>
+                <a:latin typeface="DM Sans" pitchFamily="34" charset="0"/>
+                <a:ea typeface="DM Sans" pitchFamily="34" charset="-122"/>
+                <a:cs typeface="DM Sans" pitchFamily="34" charset="-120"/>
+              </a:rPr>
+              <a:t>ROOKIES  ·  PITCH  ·  2026</a:t>
+            </a:r>
+            <a:endParaRPr lang="en-US" sz="800" dirty="0"/>
+          </a:p>
+        </p:txBody>
+      </p:sp>
+      <p:pic>
+        <p:nvPicPr>
+          <p:cNvPr id="14" name="Picture 13">
+            <a:extLst>
+              <a:ext uri="{FF2B5EF4-FFF2-40B4-BE49-F238E27FC236}">
+                <a16:creationId xmlns:a16="http://schemas.microsoft.com/office/drawing/2014/main" id="{9862DDF5-C3A7-91E6-8713-F649B3E3B3F2}"/>
+              </a:ext>
+            </a:extLst>
+          </p:cNvPr>
+          <p:cNvPicPr>
+            <a:picLocks noChangeAspect="1"/>
+          </p:cNvPicPr>
+          <p:nvPr/>
+        </p:nvPicPr>
+        <p:blipFill>
+          <a:blip r:embed="rId4"/>
+          <a:stretch>
+            <a:fillRect/>
+          </a:stretch>
+        </p:blipFill>
+        <p:spPr>
+          <a:xfrm>
+            <a:off x="1289370" y="1304832"/>
+            <a:ext cx="6394221" cy="3434584"/>
+          </a:xfrm>
+          <a:prstGeom prst="rect">
+            <a:avLst/>
+          </a:prstGeom>
+        </p:spPr>
+      </p:pic>
+      <p:sp>
+        <p:nvSpPr>
+          <p:cNvPr id="6" name="Text 20">
+            <a:extLst>
+              <a:ext uri="{FF2B5EF4-FFF2-40B4-BE49-F238E27FC236}">
+                <a16:creationId xmlns:a16="http://schemas.microsoft.com/office/drawing/2014/main" id="{F62F148B-FA09-7FA3-5D3D-0A3DF730DEF0}"/>
+              </a:ext>
+            </a:extLst>
+          </p:cNvPr>
+          <p:cNvSpPr/>
+          <p:nvPr/>
+        </p:nvSpPr>
+        <p:spPr>
+          <a:xfrm>
+            <a:off x="8275320" y="4777740"/>
+            <a:ext cx="777240" cy="228600"/>
+          </a:xfrm>
+          <a:prstGeom prst="rect">
+            <a:avLst/>
+          </a:prstGeom>
+          <a:noFill/>
+          <a:ln/>
+        </p:spPr>
+        <p:txBody>
+          <a:bodyPr wrap="square" lIns="0" tIns="0" rIns="0" bIns="0" rtlCol="0" anchor="ctr"/>
+          <a:lstStyle/>
+          <a:p>
+            <a:pPr marL="0" indent="0" algn="r">
+              <a:buNone/>
+            </a:pPr>
+            <a:r>
+              <a:rPr lang="en-US" sz="900" dirty="0">
+                <a:solidFill>
+                  <a:srgbClr val="8A8F9E"/>
+                </a:solidFill>
+                <a:latin typeface="DM Sans" pitchFamily="34" charset="0"/>
+                <a:ea typeface="DM Sans" pitchFamily="34" charset="-122"/>
+                <a:cs typeface="DM Sans" pitchFamily="34" charset="-120"/>
+              </a:rPr>
+              <a:t>10 / 14</a:t>
+            </a:r>
+            <a:endParaRPr lang="en-US" sz="900" dirty="0"/>
+          </a:p>
+        </p:txBody>
+      </p:sp>
+      <p:sp>
+        <p:nvSpPr>
+          <p:cNvPr id="7" name="Text 3">
+            <a:extLst>
+              <a:ext uri="{FF2B5EF4-FFF2-40B4-BE49-F238E27FC236}">
+                <a16:creationId xmlns:a16="http://schemas.microsoft.com/office/drawing/2014/main" id="{F7FFCD38-30C8-EF46-B313-9043C07F55C3}"/>
+              </a:ext>
+            </a:extLst>
+          </p:cNvPr>
+          <p:cNvSpPr/>
+          <p:nvPr/>
+        </p:nvSpPr>
+        <p:spPr>
+          <a:xfrm>
+            <a:off x="5078538" y="801912"/>
+            <a:ext cx="3608262" cy="365760"/>
+          </a:xfrm>
+          <a:prstGeom prst="rect">
+            <a:avLst/>
+          </a:prstGeom>
+          <a:noFill/>
+          <a:ln/>
+        </p:spPr>
+        <p:txBody>
+          <a:bodyPr wrap="square" lIns="0" tIns="0" rIns="0" bIns="0" rtlCol="0" anchor="ctr"/>
+          <a:lstStyle/>
+          <a:p>
+            <a:pPr marL="0" indent="0">
+              <a:buNone/>
+            </a:pPr>
+            <a:r>
+              <a:rPr lang="en-US" sz="1000" i="1" dirty="0">
+                <a:solidFill>
+                  <a:srgbClr val="555B6E"/>
+                </a:solidFill>
+                <a:latin typeface="DM Sans" pitchFamily="34" charset="0"/>
+                <a:ea typeface="DM Sans" pitchFamily="34" charset="-122"/>
+                <a:cs typeface="DM Sans" pitchFamily="34" charset="-120"/>
+              </a:rPr>
+              <a:t>demo version</a:t>
+            </a:r>
+            <a:endParaRPr lang="en-US" sz="1000" dirty="0"/>
+          </a:p>
+        </p:txBody>
+      </p:sp>
+    </p:spTree>
+    <p:extLst>
+      <p:ext uri="{BB962C8B-B14F-4D97-AF65-F5344CB8AC3E}">
+        <p14:creationId xmlns:p14="http://schemas.microsoft.com/office/powerpoint/2010/main" val="935474651"/>
+      </p:ext>
+    </p:extLst>
+  </p:cSld>
+  <p:clrMapOvr>
+    <a:overrideClrMapping bg1="lt1" tx1="dk1" bg2="lt2" tx2="dk2" accent1="accent1" accent2="accent2" accent3="accent3" accent4="accent4" accent5="accent5" accent6="accent6" hlink="hlink" folHlink="folHlink"/>
+  </p:clrMapOvr>
+</p:sld>
+</file>
+
+<file path=ppt/slides/slide11.xml><?xml version="1.0" encoding="utf-8"?>
 <p:sld xmlns:a="http://schemas.openxmlformats.org/drawingml/2006/main" xmlns:r="http://schemas.openxmlformats.org/officeDocument/2006/relationships" xmlns:p="http://schemas.openxmlformats.org/presentationml/2006/main">
   <p:cSld name="Slide 10">
     <p:bg>
@@ -2115,7 +2476,7 @@
                 <a:ea typeface="DM Sans" pitchFamily="34" charset="-122"/>
                 <a:cs typeface="DM Sans" pitchFamily="34" charset="-120"/>
               </a:rPr>
-              <a:t>07  ·  PILLAR THREE  ·  STUDENT VIEW</a:t>
+              <a:t>10  ·  PILLAR THREE  ·  STUDENT VIEW</a:t>
             </a:r>
             <a:endParaRPr lang="en-US" sz="900" dirty="0"/>
           </a:p>
@@ -2338,7 +2699,7 @@
                 <a:ea typeface="DM Sans" pitchFamily="34" charset="-122"/>
                 <a:cs typeface="DM Sans" pitchFamily="34" charset="-120"/>
               </a:rPr>
-              <a:t>Topics that fit the student's methods and interests — with the reason for each, not a first-come scramble.</a:t>
+              <a:t>Topics that fit the student's methods and interests: with the reason for each, not a first-come scramble.</a:t>
             </a:r>
             <a:endParaRPr lang="en-US" sz="1100" dirty="0"/>
           </a:p>
@@ -2812,7 +3173,7 @@
                 <a:ea typeface="DM Sans" pitchFamily="34" charset="-122"/>
                 <a:cs typeface="DM Sans" pitchFamily="34" charset="-120"/>
               </a:rPr>
-              <a:t>10 / 14</a:t>
+              <a:t>11 / 14</a:t>
             </a:r>
             <a:endParaRPr lang="en-US" sz="900" dirty="0"/>
           </a:p>
@@ -2865,7 +3226,7 @@
 </p:sld>
 </file>
 
-<file path=ppt/slides/slide11.xml><?xml version="1.0" encoding="utf-8"?>
+<file path=ppt/slides/slide12.xml><?xml version="1.0" encoding="utf-8"?>
 <p:sld xmlns:a="http://schemas.openxmlformats.org/drawingml/2006/main" xmlns:r="http://schemas.openxmlformats.org/officeDocument/2006/relationships" xmlns:p="http://schemas.openxmlformats.org/presentationml/2006/main">
   <p:cSld name="Slide 11">
     <p:bg>
@@ -2955,7 +3316,7 @@
                 <a:ea typeface="DM Sans" pitchFamily="34" charset="-122"/>
                 <a:cs typeface="DM Sans" pitchFamily="34" charset="-120"/>
               </a:rPr>
-              <a:t>08  ·  DATA</a:t>
+              <a:t>11  ·  DATA</a:t>
             </a:r>
             <a:endParaRPr lang="en-US" sz="900" dirty="0"/>
           </a:p>
@@ -3036,7 +3397,7 @@
                 <a:ea typeface="DM Sans" pitchFamily="34" charset="-122"/>
                 <a:cs typeface="DM Sans" pitchFamily="34" charset="-120"/>
               </a:rPr>
-              <a:t>Each allocation and each placement feeds a longitudinal record: which student–topic matches produced strong theses, which placements held, what skills the market demanded and when. That record improves every future match — and it is, in itself, a research asset.</a:t>
+              <a:t>Each allocation and each placement feeds a longitudinal record: which student–topic matches produced strong theses, which placements held, what skills the market demanded and when. That record improves every future match, and it is, in itself, a research asset.</a:t>
             </a:r>
             <a:endParaRPr lang="en-US" sz="1500" dirty="0"/>
           </a:p>
@@ -3420,7 +3781,7 @@
                 <a:ea typeface="DM Sans" pitchFamily="34" charset="-122"/>
                 <a:cs typeface="DM Sans" pitchFamily="34" charset="-120"/>
               </a:rPr>
-              <a:t>11 / 14</a:t>
+              <a:t>12/ 14</a:t>
             </a:r>
             <a:endParaRPr lang="en-US" sz="900" dirty="0"/>
           </a:p>
@@ -3473,7 +3834,7 @@
 </p:sld>
 </file>
 
-<file path=ppt/slides/slide12.xml><?xml version="1.0" encoding="utf-8"?>
+<file path=ppt/slides/slide13.xml><?xml version="1.0" encoding="utf-8"?>
 <p:sld xmlns:a="http://schemas.openxmlformats.org/drawingml/2006/main" xmlns:r="http://schemas.openxmlformats.org/officeDocument/2006/relationships" xmlns:p="http://schemas.openxmlformats.org/presentationml/2006/main">
   <p:cSld name="Slide 12">
     <p:bg>
@@ -3563,7 +3924,7 @@
                 <a:ea typeface="DM Sans" pitchFamily="34" charset="-122"/>
                 <a:cs typeface="DM Sans" pitchFamily="34" charset="-120"/>
               </a:rPr>
-              <a:t>09  ·  INNOVATION</a:t>
+              <a:t>12  ·  INNOVATION</a:t>
             </a:r>
             <a:endParaRPr lang="en-US" sz="900" dirty="0"/>
           </a:p>
@@ -3602,7 +3963,7 @@
                 <a:ea typeface="Playfair Display" pitchFamily="34" charset="-122"/>
                 <a:cs typeface="Playfair Display" pitchFamily="34" charset="-120"/>
               </a:rPr>
-              <a:t>Why this earns an innovation grant.</a:t>
+              <a:t>Innovation?</a:t>
             </a:r>
             <a:endParaRPr lang="en-US" sz="2700" dirty="0"/>
           </a:p>
@@ -3892,7 +4253,7 @@
                 <a:ea typeface="DM Sans" pitchFamily="34" charset="-122"/>
                 <a:cs typeface="DM Sans" pitchFamily="34" charset="-120"/>
               </a:rPr>
-              <a:t>Every match carries a rationale — aligned with the EU AI Act's transparency rules for high-risk systems.</a:t>
+              <a:t>Every match carries a rationale, aligned with the EU AI Act's transparency rules for high-risk systems.</a:t>
             </a:r>
             <a:endParaRPr lang="en-US" sz="1050" dirty="0"/>
           </a:p>
@@ -4366,7 +4727,7 @@
                 <a:ea typeface="DM Sans" pitchFamily="34" charset="-122"/>
                 <a:cs typeface="DM Sans" pitchFamily="34" charset="-120"/>
               </a:rPr>
-              <a:t>12 / 14</a:t>
+              <a:t>13 / 14</a:t>
             </a:r>
             <a:endParaRPr lang="en-US" sz="900" dirty="0"/>
           </a:p>
@@ -4375,761 +4736,6 @@
       <p:sp>
         <p:nvSpPr>
           <p:cNvPr id="26" name="Text 24"/>
-          <p:cNvSpPr/>
-          <p:nvPr/>
-        </p:nvSpPr>
-        <p:spPr>
-          <a:xfrm>
-            <a:off x="457200" y="4777740"/>
-            <a:ext cx="5486400" cy="228600"/>
-          </a:xfrm>
-          <a:prstGeom prst="rect">
-            <a:avLst/>
-          </a:prstGeom>
-          <a:noFill/>
-          <a:ln/>
-        </p:spPr>
-        <p:txBody>
-          <a:bodyPr wrap="square" lIns="0" tIns="0" rIns="0" bIns="0" rtlCol="0" anchor="ctr"/>
-          <a:lstStyle/>
-          <a:p>
-            <a:pPr marL="0" indent="0" algn="l">
-              <a:buNone/>
-            </a:pPr>
-            <a:r>
-              <a:rPr lang="en-US" sz="800" kern="0" spc="200" dirty="0">
-                <a:solidFill>
-                  <a:srgbClr val="8A8F9E"/>
-                </a:solidFill>
-                <a:latin typeface="DM Sans" pitchFamily="34" charset="0"/>
-                <a:ea typeface="DM Sans" pitchFamily="34" charset="-122"/>
-                <a:cs typeface="DM Sans" pitchFamily="34" charset="-120"/>
-              </a:rPr>
-              <a:t>BAOR  ×  ROOKIES  ·  INNOVATION PROPOSAL</a:t>
-            </a:r>
-            <a:endParaRPr lang="en-US" sz="800" dirty="0"/>
-          </a:p>
-        </p:txBody>
-      </p:sp>
-    </p:spTree>
-  </p:cSld>
-  <p:clrMapOvr>
-    <a:masterClrMapping/>
-  </p:clrMapOvr>
-</p:sld>
-</file>
-
-<file path=ppt/slides/slide13.xml><?xml version="1.0" encoding="utf-8"?>
-<p:sld xmlns:a="http://schemas.openxmlformats.org/drawingml/2006/main" xmlns:r="http://schemas.openxmlformats.org/officeDocument/2006/relationships" xmlns:p="http://schemas.openxmlformats.org/presentationml/2006/main">
-  <p:cSld name="Slide 13">
-    <p:bg>
-      <p:bgPr>
-        <a:solidFill>
-          <a:srgbClr val="F7F4EF"/>
-        </a:solidFill>
-        <a:effectLst/>
-      </p:bgPr>
-    </p:bg>
-    <p:spTree>
-      <p:nvGrpSpPr>
-        <p:cNvPr id="1" name=""/>
-        <p:cNvGrpSpPr/>
-        <p:nvPr/>
-      </p:nvGrpSpPr>
-      <p:grpSpPr>
-        <a:xfrm>
-          <a:off x="0" y="0"/>
-          <a:ext cx="0" cy="0"/>
-          <a:chOff x="0" y="0"/>
-          <a:chExt cx="0" cy="0"/>
-        </a:xfrm>
-      </p:grpSpPr>
-      <p:sp>
-        <p:nvSpPr>
-          <p:cNvPr id="2" name="Shape 0"/>
-          <p:cNvSpPr/>
-          <p:nvPr/>
-        </p:nvSpPr>
-        <p:spPr>
-          <a:xfrm>
-            <a:off x="457200" y="530352"/>
-            <a:ext cx="73152" cy="73152"/>
-          </a:xfrm>
-          <a:prstGeom prst="ellipse">
-            <a:avLst/>
-          </a:prstGeom>
-          <a:solidFill>
-            <a:srgbClr val="C04E1D"/>
-          </a:solidFill>
-          <a:ln w="12700">
-            <a:solidFill>
-              <a:srgbClr val="C04E1D"/>
-            </a:solidFill>
-            <a:prstDash val="solid"/>
-          </a:ln>
-        </p:spPr>
-        <p:txBody>
-          <a:bodyPr/>
-          <a:lstStyle/>
-          <a:p>
-            <a:endParaRPr lang="en-US"/>
-          </a:p>
-        </p:txBody>
-      </p:sp>
-      <p:sp>
-        <p:nvSpPr>
-          <p:cNvPr id="3" name="Text 1"/>
-          <p:cNvSpPr/>
-          <p:nvPr/>
-        </p:nvSpPr>
-        <p:spPr>
-          <a:xfrm>
-            <a:off x="658368" y="457200"/>
-            <a:ext cx="5486400" cy="274320"/>
-          </a:xfrm>
-          <a:prstGeom prst="rect">
-            <a:avLst/>
-          </a:prstGeom>
-          <a:noFill/>
-          <a:ln/>
-        </p:spPr>
-        <p:txBody>
-          <a:bodyPr wrap="square" lIns="0" tIns="0" rIns="0" bIns="0" rtlCol="0" anchor="ctr"/>
-          <a:lstStyle/>
-          <a:p>
-            <a:pPr marL="0" indent="0">
-              <a:buNone/>
-            </a:pPr>
-            <a:r>
-              <a:rPr lang="en-US" sz="900" b="1" kern="0" spc="500" dirty="0">
-                <a:solidFill>
-                  <a:srgbClr val="8A8F9E"/>
-                </a:solidFill>
-                <a:latin typeface="DM Sans" pitchFamily="34" charset="0"/>
-                <a:ea typeface="DM Sans" pitchFamily="34" charset="-122"/>
-                <a:cs typeface="DM Sans" pitchFamily="34" charset="-120"/>
-              </a:rPr>
-              <a:t>10  ·  PLAN</a:t>
-            </a:r>
-            <a:endParaRPr lang="en-US" sz="900" dirty="0"/>
-          </a:p>
-        </p:txBody>
-      </p:sp>
-      <p:sp>
-        <p:nvSpPr>
-          <p:cNvPr id="4" name="Text 2"/>
-          <p:cNvSpPr/>
-          <p:nvPr/>
-        </p:nvSpPr>
-        <p:spPr>
-          <a:xfrm>
-            <a:off x="457200" y="868680"/>
-            <a:ext cx="8229600" cy="640080"/>
-          </a:xfrm>
-          <a:prstGeom prst="rect">
-            <a:avLst/>
-          </a:prstGeom>
-          <a:noFill/>
-          <a:ln/>
-        </p:spPr>
-        <p:txBody>
-          <a:bodyPr wrap="square" lIns="0" tIns="0" rIns="0" bIns="0" rtlCol="0" anchor="ctr"/>
-          <a:lstStyle/>
-          <a:p>
-            <a:pPr marL="0" indent="0">
-              <a:buNone/>
-            </a:pPr>
-            <a:r>
-              <a:rPr lang="en-US" sz="2700" dirty="0">
-                <a:solidFill>
-                  <a:srgbClr val="0F1F3D"/>
-                </a:solidFill>
-                <a:latin typeface="Playfair Display" pitchFamily="34" charset="0"/>
-                <a:ea typeface="Playfair Display" pitchFamily="34" charset="-122"/>
-                <a:cs typeface="Playfair Display" pitchFamily="34" charset="-120"/>
-              </a:rPr>
-              <a:t>A phased pilot inside BAOR.</a:t>
-            </a:r>
-            <a:endParaRPr lang="en-US" sz="2700" dirty="0"/>
-          </a:p>
-        </p:txBody>
-      </p:sp>
-      <p:sp>
-        <p:nvSpPr>
-          <p:cNvPr id="5" name="Text 3"/>
-          <p:cNvSpPr/>
-          <p:nvPr/>
-        </p:nvSpPr>
-        <p:spPr>
-          <a:xfrm>
-            <a:off x="457200" y="1417320"/>
-            <a:ext cx="8229600" cy="365760"/>
-          </a:xfrm>
-          <a:prstGeom prst="rect">
-            <a:avLst/>
-          </a:prstGeom>
-          <a:noFill/>
-          <a:ln/>
-        </p:spPr>
-        <p:txBody>
-          <a:bodyPr wrap="square" lIns="0" tIns="0" rIns="0" bIns="0" rtlCol="0" anchor="ctr"/>
-          <a:lstStyle/>
-          <a:p>
-            <a:pPr marL="0" indent="0">
-              <a:buNone/>
-            </a:pPr>
-            <a:r>
-              <a:rPr lang="en-US" sz="1300" i="1" dirty="0">
-                <a:solidFill>
-                  <a:srgbClr val="555B6E"/>
-                </a:solidFill>
-                <a:latin typeface="DM Sans" pitchFamily="34" charset="0"/>
-                <a:ea typeface="DM Sans" pitchFamily="34" charset="-122"/>
-                <a:cs typeface="DM Sans" pitchFamily="34" charset="-120"/>
-              </a:rPr>
-              <a:t>Start where the value is high and the risk is low: the thesis allocation.</a:t>
-            </a:r>
-            <a:endParaRPr lang="en-US" sz="1300" dirty="0"/>
-          </a:p>
-        </p:txBody>
-      </p:sp>
-      <p:sp>
-        <p:nvSpPr>
-          <p:cNvPr id="6" name="Shape 4"/>
-          <p:cNvSpPr/>
-          <p:nvPr/>
-        </p:nvSpPr>
-        <p:spPr>
-          <a:xfrm>
-            <a:off x="457200" y="1828800"/>
-            <a:ext cx="8229600" cy="713232"/>
-          </a:xfrm>
-          <a:prstGeom prst="rect">
-            <a:avLst/>
-          </a:prstGeom>
-          <a:solidFill>
-            <a:srgbClr val="FFFFFF"/>
-          </a:solidFill>
-          <a:ln w="9525">
-            <a:solidFill>
-              <a:srgbClr val="CFCCC4"/>
-            </a:solidFill>
-            <a:prstDash val="solid"/>
-          </a:ln>
-        </p:spPr>
-        <p:txBody>
-          <a:bodyPr/>
-          <a:lstStyle/>
-          <a:p>
-            <a:endParaRPr lang="en-US"/>
-          </a:p>
-        </p:txBody>
-      </p:sp>
-      <p:sp>
-        <p:nvSpPr>
-          <p:cNvPr id="7" name="Text 5"/>
-          <p:cNvSpPr/>
-          <p:nvPr/>
-        </p:nvSpPr>
-        <p:spPr>
-          <a:xfrm>
-            <a:off x="594360" y="1956816"/>
-            <a:ext cx="685800" cy="457200"/>
-          </a:xfrm>
-          <a:prstGeom prst="rect">
-            <a:avLst/>
-          </a:prstGeom>
-          <a:noFill/>
-          <a:ln/>
-        </p:spPr>
-        <p:txBody>
-          <a:bodyPr wrap="square" lIns="0" tIns="0" rIns="0" bIns="0" rtlCol="0" anchor="ctr"/>
-          <a:lstStyle/>
-          <a:p>
-            <a:pPr marL="0" indent="0">
-              <a:buNone/>
-            </a:pPr>
-            <a:r>
-              <a:rPr lang="en-US" sz="2400" i="1" dirty="0">
-                <a:solidFill>
-                  <a:srgbClr val="C04E1D"/>
-                </a:solidFill>
-                <a:latin typeface="Playfair Display" pitchFamily="34" charset="0"/>
-                <a:ea typeface="Playfair Display" pitchFamily="34" charset="-122"/>
-                <a:cs typeface="Playfair Display" pitchFamily="34" charset="-120"/>
-              </a:rPr>
-              <a:t>01</a:t>
-            </a:r>
-            <a:endParaRPr lang="en-US" sz="2400" dirty="0"/>
-          </a:p>
-        </p:txBody>
-      </p:sp>
-      <p:sp>
-        <p:nvSpPr>
-          <p:cNvPr id="8" name="Text 6"/>
-          <p:cNvSpPr/>
-          <p:nvPr/>
-        </p:nvSpPr>
-        <p:spPr>
-          <a:xfrm>
-            <a:off x="1371600" y="1956816"/>
-            <a:ext cx="3017520" cy="475488"/>
-          </a:xfrm>
-          <a:prstGeom prst="rect">
-            <a:avLst/>
-          </a:prstGeom>
-          <a:noFill/>
-          <a:ln/>
-        </p:spPr>
-        <p:txBody>
-          <a:bodyPr wrap="square" lIns="0" tIns="0" rIns="0" bIns="0" rtlCol="0" anchor="ctr"/>
-          <a:lstStyle/>
-          <a:p>
-            <a:pPr marL="0" indent="0">
-              <a:buNone/>
-            </a:pPr>
-            <a:r>
-              <a:rPr lang="en-US" sz="1500" dirty="0">
-                <a:solidFill>
-                  <a:srgbClr val="0F1F3D"/>
-                </a:solidFill>
-                <a:latin typeface="Playfair Display" pitchFamily="34" charset="0"/>
-                <a:ea typeface="Playfair Display" pitchFamily="34" charset="-122"/>
-                <a:cs typeface="Playfair Display" pitchFamily="34" charset="-120"/>
-              </a:rPr>
-              <a:t>Thesis allocation</a:t>
-            </a:r>
-            <a:endParaRPr lang="en-US" sz="1500" dirty="0"/>
-          </a:p>
-        </p:txBody>
-      </p:sp>
-      <p:sp>
-        <p:nvSpPr>
-          <p:cNvPr id="9" name="Text 7"/>
-          <p:cNvSpPr/>
-          <p:nvPr/>
-        </p:nvSpPr>
-        <p:spPr>
-          <a:xfrm>
-            <a:off x="4389120" y="1920240"/>
-            <a:ext cx="4160520" cy="566928"/>
-          </a:xfrm>
-          <a:prstGeom prst="rect">
-            <a:avLst/>
-          </a:prstGeom>
-          <a:noFill/>
-          <a:ln/>
-        </p:spPr>
-        <p:txBody>
-          <a:bodyPr wrap="square" lIns="0" tIns="0" rIns="0" bIns="0" rtlCol="0" anchor="ctr"/>
-          <a:lstStyle/>
-          <a:p>
-            <a:pPr marL="0" indent="0">
-              <a:lnSpc>
-                <a:spcPct val="120000"/>
-              </a:lnSpc>
-              <a:buNone/>
-            </a:pPr>
-            <a:r>
-              <a:rPr lang="en-US" sz="1050" dirty="0">
-                <a:solidFill>
-                  <a:srgbClr val="1A1A2E"/>
-                </a:solidFill>
-                <a:latin typeface="DM Sans" pitchFamily="34" charset="0"/>
-                <a:ea typeface="DM Sans" pitchFamily="34" charset="-122"/>
-                <a:cs typeface="DM Sans" pitchFamily="34" charset="-120"/>
-              </a:rPr>
-              <a:t>One BAOR cohort. Internal, contained, measurable — coordinator hours and student satisfaction tracked against the manual baseline.</a:t>
-            </a:r>
-            <a:endParaRPr lang="en-US" sz="1050" dirty="0"/>
-          </a:p>
-        </p:txBody>
-      </p:sp>
-      <p:sp>
-        <p:nvSpPr>
-          <p:cNvPr id="10" name="Shape 8"/>
-          <p:cNvSpPr/>
-          <p:nvPr/>
-        </p:nvSpPr>
-        <p:spPr>
-          <a:xfrm>
-            <a:off x="457200" y="2606040"/>
-            <a:ext cx="8229600" cy="713232"/>
-          </a:xfrm>
-          <a:prstGeom prst="rect">
-            <a:avLst/>
-          </a:prstGeom>
-          <a:solidFill>
-            <a:srgbClr val="FFFFFF"/>
-          </a:solidFill>
-          <a:ln w="9525">
-            <a:solidFill>
-              <a:srgbClr val="CFCCC4"/>
-            </a:solidFill>
-            <a:prstDash val="solid"/>
-          </a:ln>
-        </p:spPr>
-        <p:txBody>
-          <a:bodyPr/>
-          <a:lstStyle/>
-          <a:p>
-            <a:endParaRPr lang="en-US"/>
-          </a:p>
-        </p:txBody>
-      </p:sp>
-      <p:sp>
-        <p:nvSpPr>
-          <p:cNvPr id="11" name="Text 9"/>
-          <p:cNvSpPr/>
-          <p:nvPr/>
-        </p:nvSpPr>
-        <p:spPr>
-          <a:xfrm>
-            <a:off x="594360" y="2734056"/>
-            <a:ext cx="685800" cy="457200"/>
-          </a:xfrm>
-          <a:prstGeom prst="rect">
-            <a:avLst/>
-          </a:prstGeom>
-          <a:noFill/>
-          <a:ln/>
-        </p:spPr>
-        <p:txBody>
-          <a:bodyPr wrap="square" lIns="0" tIns="0" rIns="0" bIns="0" rtlCol="0" anchor="ctr"/>
-          <a:lstStyle/>
-          <a:p>
-            <a:pPr marL="0" indent="0">
-              <a:buNone/>
-            </a:pPr>
-            <a:r>
-              <a:rPr lang="en-US" sz="2400" i="1" dirty="0">
-                <a:solidFill>
-                  <a:srgbClr val="C04E1D"/>
-                </a:solidFill>
-                <a:latin typeface="Playfair Display" pitchFamily="34" charset="0"/>
-                <a:ea typeface="Playfair Display" pitchFamily="34" charset="-122"/>
-                <a:cs typeface="Playfair Display" pitchFamily="34" charset="-120"/>
-              </a:rPr>
-              <a:t>02</a:t>
-            </a:r>
-            <a:endParaRPr lang="en-US" sz="2400" dirty="0"/>
-          </a:p>
-        </p:txBody>
-      </p:sp>
-      <p:sp>
-        <p:nvSpPr>
-          <p:cNvPr id="12" name="Text 10"/>
-          <p:cNvSpPr/>
-          <p:nvPr/>
-        </p:nvSpPr>
-        <p:spPr>
-          <a:xfrm>
-            <a:off x="1371600" y="2734056"/>
-            <a:ext cx="3017520" cy="475488"/>
-          </a:xfrm>
-          <a:prstGeom prst="rect">
-            <a:avLst/>
-          </a:prstGeom>
-          <a:noFill/>
-          <a:ln/>
-        </p:spPr>
-        <p:txBody>
-          <a:bodyPr wrap="square" lIns="0" tIns="0" rIns="0" bIns="0" rtlCol="0" anchor="ctr"/>
-          <a:lstStyle/>
-          <a:p>
-            <a:pPr marL="0" indent="0">
-              <a:buNone/>
-            </a:pPr>
-            <a:r>
-              <a:rPr lang="en-US" sz="1500" dirty="0">
-                <a:solidFill>
-                  <a:srgbClr val="0F1F3D"/>
-                </a:solidFill>
-                <a:latin typeface="Playfair Display" pitchFamily="34" charset="0"/>
-                <a:ea typeface="Playfair Display" pitchFamily="34" charset="-122"/>
-                <a:cs typeface="Playfair Display" pitchFamily="34" charset="-120"/>
-              </a:rPr>
-              <a:t>Job matching + dashboard</a:t>
-            </a:r>
-            <a:endParaRPr lang="en-US" sz="1500" dirty="0"/>
-          </a:p>
-        </p:txBody>
-      </p:sp>
-      <p:sp>
-        <p:nvSpPr>
-          <p:cNvPr id="13" name="Text 11"/>
-          <p:cNvSpPr/>
-          <p:nvPr/>
-        </p:nvSpPr>
-        <p:spPr>
-          <a:xfrm>
-            <a:off x="4389120" y="2697480"/>
-            <a:ext cx="4160520" cy="566928"/>
-          </a:xfrm>
-          <a:prstGeom prst="rect">
-            <a:avLst/>
-          </a:prstGeom>
-          <a:noFill/>
-          <a:ln/>
-        </p:spPr>
-        <p:txBody>
-          <a:bodyPr wrap="square" lIns="0" tIns="0" rIns="0" bIns="0" rtlCol="0" anchor="ctr"/>
-          <a:lstStyle/>
-          <a:p>
-            <a:pPr marL="0" indent="0">
-              <a:lnSpc>
-                <a:spcPct val="120000"/>
-              </a:lnSpc>
-              <a:buNone/>
-            </a:pPr>
-            <a:r>
-              <a:rPr lang="en-US" sz="1050" dirty="0">
-                <a:solidFill>
-                  <a:srgbClr val="1A1A2E"/>
-                </a:solidFill>
-                <a:latin typeface="DM Sans" pitchFamily="34" charset="0"/>
-                <a:ea typeface="DM Sans" pitchFamily="34" charset="-122"/>
-                <a:cs typeface="DM Sans" pitchFamily="34" charset="-120"/>
-              </a:rPr>
-              <a:t>Extend the same engine to early-career roles for the cohort. Career Officer dashboard live for the BAOR career team.</a:t>
-            </a:r>
-            <a:endParaRPr lang="en-US" sz="1050" dirty="0"/>
-          </a:p>
-        </p:txBody>
-      </p:sp>
-      <p:sp>
-        <p:nvSpPr>
-          <p:cNvPr id="14" name="Shape 12"/>
-          <p:cNvSpPr/>
-          <p:nvPr/>
-        </p:nvSpPr>
-        <p:spPr>
-          <a:xfrm>
-            <a:off x="457200" y="3383280"/>
-            <a:ext cx="8229600" cy="713232"/>
-          </a:xfrm>
-          <a:prstGeom prst="rect">
-            <a:avLst/>
-          </a:prstGeom>
-          <a:solidFill>
-            <a:srgbClr val="FFFFFF"/>
-          </a:solidFill>
-          <a:ln w="9525">
-            <a:solidFill>
-              <a:srgbClr val="CFCCC4"/>
-            </a:solidFill>
-            <a:prstDash val="solid"/>
-          </a:ln>
-        </p:spPr>
-        <p:txBody>
-          <a:bodyPr/>
-          <a:lstStyle/>
-          <a:p>
-            <a:endParaRPr lang="en-US"/>
-          </a:p>
-        </p:txBody>
-      </p:sp>
-      <p:sp>
-        <p:nvSpPr>
-          <p:cNvPr id="15" name="Text 13"/>
-          <p:cNvSpPr/>
-          <p:nvPr/>
-        </p:nvSpPr>
-        <p:spPr>
-          <a:xfrm>
-            <a:off x="594360" y="3511296"/>
-            <a:ext cx="685800" cy="457200"/>
-          </a:xfrm>
-          <a:prstGeom prst="rect">
-            <a:avLst/>
-          </a:prstGeom>
-          <a:noFill/>
-          <a:ln/>
-        </p:spPr>
-        <p:txBody>
-          <a:bodyPr wrap="square" lIns="0" tIns="0" rIns="0" bIns="0" rtlCol="0" anchor="ctr"/>
-          <a:lstStyle/>
-          <a:p>
-            <a:pPr marL="0" indent="0">
-              <a:buNone/>
-            </a:pPr>
-            <a:r>
-              <a:rPr lang="en-US" sz="2400" i="1" dirty="0">
-                <a:solidFill>
-                  <a:srgbClr val="C04E1D"/>
-                </a:solidFill>
-                <a:latin typeface="Playfair Display" pitchFamily="34" charset="0"/>
-                <a:ea typeface="Playfair Display" pitchFamily="34" charset="-122"/>
-                <a:cs typeface="Playfair Display" pitchFamily="34" charset="-120"/>
-              </a:rPr>
-              <a:t>03</a:t>
-            </a:r>
-            <a:endParaRPr lang="en-US" sz="2400" dirty="0"/>
-          </a:p>
-        </p:txBody>
-      </p:sp>
-      <p:sp>
-        <p:nvSpPr>
-          <p:cNvPr id="16" name="Text 14"/>
-          <p:cNvSpPr/>
-          <p:nvPr/>
-        </p:nvSpPr>
-        <p:spPr>
-          <a:xfrm>
-            <a:off x="1371600" y="3511296"/>
-            <a:ext cx="3017520" cy="475488"/>
-          </a:xfrm>
-          <a:prstGeom prst="rect">
-            <a:avLst/>
-          </a:prstGeom>
-          <a:noFill/>
-          <a:ln/>
-        </p:spPr>
-        <p:txBody>
-          <a:bodyPr wrap="square" lIns="0" tIns="0" rIns="0" bIns="0" rtlCol="0" anchor="ctr"/>
-          <a:lstStyle/>
-          <a:p>
-            <a:pPr marL="0" indent="0">
-              <a:buNone/>
-            </a:pPr>
-            <a:r>
-              <a:rPr lang="en-US" sz="1500" dirty="0">
-                <a:solidFill>
-                  <a:srgbClr val="0F1F3D"/>
-                </a:solidFill>
-                <a:latin typeface="Playfair Display" pitchFamily="34" charset="0"/>
-                <a:ea typeface="Playfair Display" pitchFamily="34" charset="-122"/>
-                <a:cs typeface="Playfair Display" pitchFamily="34" charset="-120"/>
-              </a:rPr>
-              <a:t>Full portal + research</a:t>
-            </a:r>
-            <a:endParaRPr lang="en-US" sz="1500" dirty="0"/>
-          </a:p>
-        </p:txBody>
-      </p:sp>
-      <p:sp>
-        <p:nvSpPr>
-          <p:cNvPr id="17" name="Text 15"/>
-          <p:cNvSpPr/>
-          <p:nvPr/>
-        </p:nvSpPr>
-        <p:spPr>
-          <a:xfrm>
-            <a:off x="4389120" y="3474720"/>
-            <a:ext cx="4160520" cy="566928"/>
-          </a:xfrm>
-          <a:prstGeom prst="rect">
-            <a:avLst/>
-          </a:prstGeom>
-          <a:noFill/>
-          <a:ln/>
-        </p:spPr>
-        <p:txBody>
-          <a:bodyPr wrap="square" lIns="0" tIns="0" rIns="0" bIns="0" rtlCol="0" anchor="ctr"/>
-          <a:lstStyle/>
-          <a:p>
-            <a:pPr marL="0" indent="0">
-              <a:lnSpc>
-                <a:spcPct val="120000"/>
-              </a:lnSpc>
-              <a:buNone/>
-            </a:pPr>
-            <a:r>
-              <a:rPr lang="en-US" sz="1050" dirty="0">
-                <a:solidFill>
-                  <a:srgbClr val="1A1A2E"/>
-                </a:solidFill>
-                <a:latin typeface="DM Sans" pitchFamily="34" charset="0"/>
-                <a:ea typeface="DM Sans" pitchFamily="34" charset="-122"/>
-                <a:cs typeface="DM Sans" pitchFamily="34" charset="-120"/>
-              </a:rPr>
-              <a:t>Longitudinal tracking across cohorts. Outcome data feeds the matching paper and program-level decisions.</a:t>
-            </a:r>
-            <a:endParaRPr lang="en-US" sz="1050" dirty="0"/>
-          </a:p>
-        </p:txBody>
-      </p:sp>
-      <p:sp>
-        <p:nvSpPr>
-          <p:cNvPr id="18" name="Text 16"/>
-          <p:cNvSpPr/>
-          <p:nvPr/>
-        </p:nvSpPr>
-        <p:spPr>
-          <a:xfrm>
-            <a:off x="457200" y="4370832"/>
-            <a:ext cx="8229600" cy="274320"/>
-          </a:xfrm>
-          <a:prstGeom prst="rect">
-            <a:avLst/>
-          </a:prstGeom>
-          <a:noFill/>
-          <a:ln/>
-        </p:spPr>
-        <p:txBody>
-          <a:bodyPr wrap="square" lIns="0" tIns="0" rIns="0" bIns="0" rtlCol="0" anchor="ctr"/>
-          <a:lstStyle/>
-          <a:p>
-            <a:pPr marL="0" indent="0">
-              <a:buNone/>
-            </a:pPr>
-            <a:r>
-              <a:rPr lang="en-US" sz="1200" i="1" dirty="0">
-                <a:solidFill>
-                  <a:srgbClr val="0F1F3D"/>
-                </a:solidFill>
-                <a:latin typeface="Playfair Display" pitchFamily="34" charset="0"/>
-                <a:ea typeface="Playfair Display" pitchFamily="34" charset="-122"/>
-                <a:cs typeface="Playfair Display" pitchFamily="34" charset="-120"/>
-              </a:rPr>
-              <a:t>The grant funds engineering, data integration, and an evaluation study against the manual baseline.</a:t>
-            </a:r>
-            <a:endParaRPr lang="en-US" sz="1200" dirty="0"/>
-          </a:p>
-        </p:txBody>
-      </p:sp>
-      <p:sp>
-        <p:nvSpPr>
-          <p:cNvPr id="19" name="Text 17"/>
-          <p:cNvSpPr/>
-          <p:nvPr/>
-        </p:nvSpPr>
-        <p:spPr>
-          <a:xfrm>
-            <a:off x="8275320" y="4777740"/>
-            <a:ext cx="777240" cy="228600"/>
-          </a:xfrm>
-          <a:prstGeom prst="rect">
-            <a:avLst/>
-          </a:prstGeom>
-          <a:noFill/>
-          <a:ln/>
-        </p:spPr>
-        <p:txBody>
-          <a:bodyPr wrap="square" lIns="0" tIns="0" rIns="0" bIns="0" rtlCol="0" anchor="ctr"/>
-          <a:lstStyle/>
-          <a:p>
-            <a:pPr marL="0" indent="0" algn="r">
-              <a:buNone/>
-            </a:pPr>
-            <a:r>
-              <a:rPr lang="en-US" sz="900" dirty="0">
-                <a:solidFill>
-                  <a:srgbClr val="8A8F9E"/>
-                </a:solidFill>
-                <a:latin typeface="DM Sans" pitchFamily="34" charset="0"/>
-                <a:ea typeface="DM Sans" pitchFamily="34" charset="-122"/>
-                <a:cs typeface="DM Sans" pitchFamily="34" charset="-120"/>
-              </a:rPr>
-              <a:t>13 / 14</a:t>
-            </a:r>
-            <a:endParaRPr lang="en-US" sz="900" dirty="0"/>
-          </a:p>
-        </p:txBody>
-      </p:sp>
-      <p:sp>
-        <p:nvSpPr>
-          <p:cNvPr id="20" name="Text 18"/>
           <p:cNvSpPr/>
           <p:nvPr/>
         </p:nvSpPr>
@@ -5264,7 +4870,7 @@
                 <a:ea typeface="DM Sans" pitchFamily="34" charset="-122"/>
                 <a:cs typeface="DM Sans" pitchFamily="34" charset="-120"/>
               </a:rPr>
-              <a:t>11  ·  VISION</a:t>
+              <a:t>13  ·  VISION</a:t>
             </a:r>
             <a:endParaRPr lang="en-US" sz="900" dirty="0"/>
           </a:p>
@@ -5561,7 +5167,7 @@
         </p:nvSpPr>
         <p:spPr>
           <a:xfrm>
-            <a:off x="640080" y="1234440"/>
+            <a:off x="640080" y="851820"/>
             <a:ext cx="8229600" cy="822960"/>
           </a:xfrm>
           <a:prstGeom prst="rect">
@@ -5600,7 +5206,7 @@
         </p:nvSpPr>
         <p:spPr>
           <a:xfrm>
-            <a:off x="640080" y="2057400"/>
+            <a:off x="640080" y="1674780"/>
             <a:ext cx="8229600" cy="822960"/>
           </a:xfrm>
           <a:prstGeom prst="rect">
@@ -5650,7 +5256,7 @@
         </p:nvSpPr>
         <p:spPr>
           <a:xfrm>
-            <a:off x="640080" y="3383280"/>
+            <a:off x="640080" y="2987690"/>
             <a:ext cx="7863840" cy="1188720"/>
           </a:xfrm>
           <a:prstGeom prst="rect">
@@ -6672,7 +6278,7 @@
         </p:nvSpPr>
         <p:spPr>
           <a:xfrm>
-            <a:off x="457200" y="2148840"/>
+            <a:off x="457200" y="1973745"/>
             <a:ext cx="2697480" cy="1554480"/>
           </a:xfrm>
           <a:prstGeom prst="rect">
@@ -6704,7 +6310,7 @@
         </p:nvSpPr>
         <p:spPr>
           <a:xfrm>
-            <a:off x="658368" y="2313432"/>
+            <a:off x="658368" y="2138337"/>
             <a:ext cx="2295144" cy="457200"/>
           </a:xfrm>
           <a:prstGeom prst="rect">
@@ -6743,7 +6349,7 @@
         </p:nvSpPr>
         <p:spPr>
           <a:xfrm>
-            <a:off x="658368" y="2807208"/>
+            <a:off x="658368" y="2632113"/>
             <a:ext cx="2295144" cy="365760"/>
           </a:xfrm>
           <a:prstGeom prst="rect">
@@ -6782,7 +6388,7 @@
         </p:nvSpPr>
         <p:spPr>
           <a:xfrm>
-            <a:off x="658368" y="3136392"/>
+            <a:off x="658368" y="2961297"/>
             <a:ext cx="2295144" cy="502920"/>
           </a:xfrm>
           <a:prstGeom prst="rect">
@@ -6824,7 +6430,7 @@
         </p:nvSpPr>
         <p:spPr>
           <a:xfrm>
-            <a:off x="3383280" y="2148840"/>
+            <a:off x="3383280" y="1973745"/>
             <a:ext cx="2697480" cy="1554480"/>
           </a:xfrm>
           <a:prstGeom prst="rect">
@@ -6856,7 +6462,7 @@
         </p:nvSpPr>
         <p:spPr>
           <a:xfrm>
-            <a:off x="3584448" y="2313432"/>
+            <a:off x="3584448" y="2138337"/>
             <a:ext cx="2295144" cy="457200"/>
           </a:xfrm>
           <a:prstGeom prst="rect">
@@ -6895,7 +6501,7 @@
         </p:nvSpPr>
         <p:spPr>
           <a:xfrm>
-            <a:off x="3584448" y="2807208"/>
+            <a:off x="3584448" y="2632113"/>
             <a:ext cx="2295144" cy="365760"/>
           </a:xfrm>
           <a:prstGeom prst="rect">
@@ -6934,7 +6540,7 @@
         </p:nvSpPr>
         <p:spPr>
           <a:xfrm>
-            <a:off x="3584448" y="3136392"/>
+            <a:off x="3584448" y="2961297"/>
             <a:ext cx="2295144" cy="502920"/>
           </a:xfrm>
           <a:prstGeom prst="rect">
@@ -6976,7 +6582,7 @@
         </p:nvSpPr>
         <p:spPr>
           <a:xfrm>
-            <a:off x="6309360" y="2148840"/>
+            <a:off x="6309360" y="1973745"/>
             <a:ext cx="2697480" cy="1554480"/>
           </a:xfrm>
           <a:prstGeom prst="rect">
@@ -7008,7 +6614,7 @@
         </p:nvSpPr>
         <p:spPr>
           <a:xfrm>
-            <a:off x="6510528" y="2313432"/>
+            <a:off x="6510528" y="2138337"/>
             <a:ext cx="2295144" cy="457200"/>
           </a:xfrm>
           <a:prstGeom prst="rect">
@@ -7047,7 +6653,7 @@
         </p:nvSpPr>
         <p:spPr>
           <a:xfrm>
-            <a:off x="6510528" y="2807208"/>
+            <a:off x="6510528" y="2632113"/>
             <a:ext cx="2295144" cy="365760"/>
           </a:xfrm>
           <a:prstGeom prst="rect">
@@ -7086,7 +6692,7 @@
         </p:nvSpPr>
         <p:spPr>
           <a:xfrm>
-            <a:off x="6510528" y="3136392"/>
+            <a:off x="6510528" y="2961297"/>
             <a:ext cx="2295144" cy="502920"/>
           </a:xfrm>
           <a:prstGeom prst="rect">
@@ -7128,7 +6734,7 @@
         </p:nvSpPr>
         <p:spPr>
           <a:xfrm>
-            <a:off x="457200" y="3977640"/>
+            <a:off x="457200" y="3757149"/>
             <a:ext cx="8229600" cy="731520"/>
           </a:xfrm>
           <a:prstGeom prst="rect">
@@ -7393,13 +6999,15 @@
         </p:nvPicPr>
         <p:blipFill>
           <a:blip r:embed="rId3"/>
-          <a:srcRect/>
-          <a:stretch/>
+          <a:srcRect t="8864" b="16162"/>
+          <a:stretch>
+            <a:fillRect/>
+          </a:stretch>
         </p:blipFill>
         <p:spPr>
           <a:xfrm>
-            <a:off x="594360" y="1600200"/>
-            <a:ext cx="7955280" cy="4211619"/>
+            <a:off x="594360" y="1414359"/>
+            <a:ext cx="7955280" cy="3157641"/>
           </a:xfrm>
           <a:prstGeom prst="rect">
             <a:avLst/>
@@ -7687,24 +7295,23 @@
           <a:bodyPr wrap="square" lIns="0" tIns="0" rIns="0" bIns="0" rtlCol="0" anchor="ctr"/>
           <a:lstStyle/>
           <a:p>
-            <a:pPr marL="0" indent="0">
+            <a:pPr>
               <a:lnSpc>
                 <a:spcPct val="145000"/>
               </a:lnSpc>
-              <a:buNone/>
-            </a:pPr>
-            <a:r>
-              <a:rPr lang="en-US" sz="1400" dirty="0">
-                <a:solidFill>
-                  <a:srgbClr val="1A1A2E"/>
-                </a:solidFill>
-                <a:latin typeface="DM Sans" pitchFamily="34" charset="0"/>
-                <a:ea typeface="DM Sans" pitchFamily="34" charset="-122"/>
-                <a:cs typeface="DM Sans" pitchFamily="34" charset="-120"/>
-              </a:rPr>
-              <a:t>Students rank topics. Coordinators express preferences over students and a supervision capacity. The algorithm returns a stable allocation — one in which no student and coordinator would both prefer to be matched to each other instead. It is the same many-to-one structure as the medical-residency match, with topics standing in for positions.</a:t>
-            </a:r>
-            <a:endParaRPr lang="en-US" sz="1400" dirty="0"/>
+            </a:pPr>
+            <a:r>
+              <a:rPr lang="en-US" sz="1200" dirty="0"/>
+              <a:t>Each student–topic pair receives a compatibility score from the matching engine, blending methodological fit, prior coursework, and stated interest. The algorithm then returns the assignment that maximizes total compatibility across the cohort, subject to each coordinator's supervision capacity and expertise. Individual fit and the strength of the cohort-wide allocation are produced together,  the best overall set of theses the </a:t>
+            </a:r>
+            <a:r>
+              <a:rPr lang="en-US" sz="1200" dirty="0" err="1"/>
+              <a:t>programme</a:t>
+            </a:r>
+            <a:r>
+              <a:rPr lang="en-US" sz="1200" dirty="0"/>
+              <a:t> can run this year.</a:t>
+            </a:r>
           </a:p>
         </p:txBody>
       </p:sp>
@@ -8375,250 +7982,6 @@
 </file>
 
 <file path=ppt/slides/slide7.xml><?xml version="1.0" encoding="utf-8"?>
-<p:sld xmlns:a="http://schemas.openxmlformats.org/drawingml/2006/main" xmlns:r="http://schemas.openxmlformats.org/officeDocument/2006/relationships" xmlns:p="http://schemas.openxmlformats.org/presentationml/2006/main">
-  <p:cSld name="Slide 7">
-    <p:bg>
-      <p:bgPr>
-        <a:solidFill>
-          <a:srgbClr val="F7F4EF"/>
-        </a:solidFill>
-        <a:effectLst/>
-      </p:bgPr>
-    </p:bg>
-    <p:spTree>
-      <p:nvGrpSpPr>
-        <p:cNvPr id="1" name=""/>
-        <p:cNvGrpSpPr/>
-        <p:nvPr/>
-      </p:nvGrpSpPr>
-      <p:grpSpPr>
-        <a:xfrm>
-          <a:off x="0" y="0"/>
-          <a:ext cx="0" cy="0"/>
-          <a:chOff x="0" y="0"/>
-          <a:chExt cx="0" cy="0"/>
-        </a:xfrm>
-      </p:grpSpPr>
-      <p:sp>
-        <p:nvSpPr>
-          <p:cNvPr id="2" name="Shape 0"/>
-          <p:cNvSpPr/>
-          <p:nvPr/>
-        </p:nvSpPr>
-        <p:spPr>
-          <a:xfrm>
-            <a:off x="457200" y="530352"/>
-            <a:ext cx="73152" cy="73152"/>
-          </a:xfrm>
-          <a:prstGeom prst="ellipse">
-            <a:avLst/>
-          </a:prstGeom>
-          <a:solidFill>
-            <a:srgbClr val="C04E1D"/>
-          </a:solidFill>
-          <a:ln w="12700">
-            <a:solidFill>
-              <a:srgbClr val="C04E1D"/>
-            </a:solidFill>
-            <a:prstDash val="solid"/>
-          </a:ln>
-        </p:spPr>
-        <p:txBody>
-          <a:bodyPr/>
-          <a:lstStyle/>
-          <a:p>
-            <a:endParaRPr lang="en-US"/>
-          </a:p>
-        </p:txBody>
-      </p:sp>
-      <p:sp>
-        <p:nvSpPr>
-          <p:cNvPr id="3" name="Text 1"/>
-          <p:cNvSpPr/>
-          <p:nvPr/>
-        </p:nvSpPr>
-        <p:spPr>
-          <a:xfrm>
-            <a:off x="658368" y="457200"/>
-            <a:ext cx="5486400" cy="274320"/>
-          </a:xfrm>
-          <a:prstGeom prst="rect">
-            <a:avLst/>
-          </a:prstGeom>
-          <a:noFill/>
-          <a:ln/>
-        </p:spPr>
-        <p:txBody>
-          <a:bodyPr wrap="square" lIns="0" tIns="0" rIns="0" bIns="0" rtlCol="0" anchor="ctr"/>
-          <a:lstStyle/>
-          <a:p>
-            <a:pPr marL="0" indent="0">
-              <a:buNone/>
-            </a:pPr>
-            <a:r>
-              <a:rPr lang="en-US" sz="900" b="1" kern="0" spc="500" dirty="0">
-                <a:solidFill>
-                  <a:srgbClr val="8A8F9E"/>
-                </a:solidFill>
-                <a:latin typeface="DM Sans" pitchFamily="34" charset="0"/>
-                <a:ea typeface="DM Sans" pitchFamily="34" charset="-122"/>
-                <a:cs typeface="DM Sans" pitchFamily="34" charset="-120"/>
-              </a:rPr>
-              <a:t>05  ·  PILLAR ONE  ·  THESIS</a:t>
-            </a:r>
-            <a:endParaRPr lang="en-US" sz="900" dirty="0"/>
-          </a:p>
-        </p:txBody>
-      </p:sp>
-      <p:sp>
-        <p:nvSpPr>
-          <p:cNvPr id="4" name="Text 2"/>
-          <p:cNvSpPr/>
-          <p:nvPr/>
-        </p:nvSpPr>
-        <p:spPr>
-          <a:xfrm>
-            <a:off x="457200" y="868680"/>
-            <a:ext cx="8229600" cy="548640"/>
-          </a:xfrm>
-          <a:prstGeom prst="rect">
-            <a:avLst/>
-          </a:prstGeom>
-          <a:noFill/>
-          <a:ln/>
-        </p:spPr>
-        <p:txBody>
-          <a:bodyPr wrap="square" lIns="0" tIns="0" rIns="0" bIns="0" rtlCol="0" anchor="ctr"/>
-          <a:lstStyle/>
-          <a:p>
-            <a:pPr marL="0" indent="0">
-              <a:buNone/>
-            </a:pPr>
-            <a:r>
-              <a:rPr lang="en-US" sz="2600" dirty="0">
-                <a:solidFill>
-                  <a:srgbClr val="0F1F3D"/>
-                </a:solidFill>
-                <a:latin typeface="Playfair Display" pitchFamily="34" charset="0"/>
-                <a:ea typeface="Playfair Display" pitchFamily="34" charset="-122"/>
-                <a:cs typeface="Playfair Display" pitchFamily="34" charset="-120"/>
-              </a:rPr>
-              <a:t>From inbox to stable allocation.</a:t>
-            </a:r>
-            <a:endParaRPr lang="en-US" sz="2600" dirty="0"/>
-          </a:p>
-        </p:txBody>
-      </p:sp>
-      <p:pic>
-        <p:nvPicPr>
-          <p:cNvPr id="5" name="Image 0" descr="/sessions/loving-bold-gates/mnt/outputs/deck/mockups/baor-thesis.png"/>
-          <p:cNvPicPr>
-            <a:picLocks noChangeAspect="1"/>
-          </p:cNvPicPr>
-          <p:nvPr/>
-        </p:nvPicPr>
-        <p:blipFill>
-          <a:blip r:embed="rId3"/>
-          <a:srcRect/>
-          <a:stretch/>
-        </p:blipFill>
-        <p:spPr>
-          <a:xfrm>
-            <a:off x="502920" y="1417320"/>
-            <a:ext cx="8138160" cy="4547795"/>
-          </a:xfrm>
-          <a:prstGeom prst="rect">
-            <a:avLst/>
-          </a:prstGeom>
-        </p:spPr>
-      </p:pic>
-      <p:sp>
-        <p:nvSpPr>
-          <p:cNvPr id="6" name="Text 3"/>
-          <p:cNvSpPr/>
-          <p:nvPr/>
-        </p:nvSpPr>
-        <p:spPr>
-          <a:xfrm>
-            <a:off x="8275320" y="4777740"/>
-            <a:ext cx="777240" cy="228600"/>
-          </a:xfrm>
-          <a:prstGeom prst="rect">
-            <a:avLst/>
-          </a:prstGeom>
-          <a:noFill/>
-          <a:ln/>
-        </p:spPr>
-        <p:txBody>
-          <a:bodyPr wrap="square" lIns="0" tIns="0" rIns="0" bIns="0" rtlCol="0" anchor="ctr"/>
-          <a:lstStyle/>
-          <a:p>
-            <a:pPr marL="0" indent="0" algn="r">
-              <a:buNone/>
-            </a:pPr>
-            <a:r>
-              <a:rPr lang="en-US" sz="900" dirty="0">
-                <a:solidFill>
-                  <a:srgbClr val="8A8F9E"/>
-                </a:solidFill>
-                <a:latin typeface="DM Sans" pitchFamily="34" charset="0"/>
-                <a:ea typeface="DM Sans" pitchFamily="34" charset="-122"/>
-                <a:cs typeface="DM Sans" pitchFamily="34" charset="-120"/>
-              </a:rPr>
-              <a:t>7 / 14</a:t>
-            </a:r>
-            <a:endParaRPr lang="en-US" sz="900" dirty="0"/>
-          </a:p>
-        </p:txBody>
-      </p:sp>
-      <p:sp>
-        <p:nvSpPr>
-          <p:cNvPr id="7" name="Text 4"/>
-          <p:cNvSpPr/>
-          <p:nvPr/>
-        </p:nvSpPr>
-        <p:spPr>
-          <a:xfrm>
-            <a:off x="457200" y="4777740"/>
-            <a:ext cx="5486400" cy="228600"/>
-          </a:xfrm>
-          <a:prstGeom prst="rect">
-            <a:avLst/>
-          </a:prstGeom>
-          <a:noFill/>
-          <a:ln/>
-        </p:spPr>
-        <p:txBody>
-          <a:bodyPr wrap="square" lIns="0" tIns="0" rIns="0" bIns="0" rtlCol="0" anchor="ctr"/>
-          <a:lstStyle/>
-          <a:p>
-            <a:pPr marL="0" indent="0" algn="l">
-              <a:buNone/>
-            </a:pPr>
-            <a:r>
-              <a:rPr lang="en-US" sz="800" kern="0" spc="200" dirty="0">
-                <a:solidFill>
-                  <a:srgbClr val="8A8F9E"/>
-                </a:solidFill>
-                <a:latin typeface="DM Sans" pitchFamily="34" charset="0"/>
-                <a:ea typeface="DM Sans" pitchFamily="34" charset="-122"/>
-                <a:cs typeface="DM Sans" pitchFamily="34" charset="-120"/>
-              </a:rPr>
-              <a:t>BAOR  ×  ROOKIES  ·  INNOVATION PROPOSAL</a:t>
-            </a:r>
-            <a:endParaRPr lang="en-US" sz="800" dirty="0"/>
-          </a:p>
-        </p:txBody>
-      </p:sp>
-    </p:spTree>
-  </p:cSld>
-  <p:clrMapOvr>
-    <a:masterClrMapping/>
-  </p:clrMapOvr>
-</p:sld>
-</file>
-
-<file path=ppt/slides/slide8.xml><?xml version="1.0" encoding="utf-8"?>
 <p:sld xmlns:a="http://schemas.openxmlformats.org/drawingml/2006/main" xmlns:r="http://schemas.openxmlformats.org/officeDocument/2006/relationships" xmlns:p="http://schemas.openxmlformats.org/presentationml/2006/main">
   <p:cSld name="Slide 8">
     <p:bg>
@@ -8828,7 +8191,7 @@
                 <a:ea typeface="DM Sans" pitchFamily="34" charset="-122"/>
                 <a:cs typeface="DM Sans" pitchFamily="34" charset="-120"/>
               </a:rPr>
-              <a:t>A BAOR student builds one profile — courses, projects, skills, ambitions. The matching engine scores fit against live roles: a quantitative layer over structured features, and a reasoning layer for the qualitative signal that mathematics cannot capture. The student receives a short list of ranked, explained matches — five roles worth applying to, not a hundred to spray.</a:t>
+              <a:t>A BAOR student builds one profile: courses, projects, skills, ambitions. The matching engine scores fit against live roles: a quantitative layer over structured features, and a reasoning layer for the qualitative signal that mathematics cannot capture. The student receives a short list of ranked, explained matches: five roles worth applying to, not a hundred to spray.</a:t>
             </a:r>
             <a:endParaRPr lang="en-US" sz="1400" dirty="0"/>
           </a:p>
@@ -9212,7 +8575,7 @@
                 <a:ea typeface="DM Sans" pitchFamily="34" charset="-122"/>
                 <a:cs typeface="DM Sans" pitchFamily="34" charset="-120"/>
               </a:rPr>
-              <a:t>8 / 14</a:t>
+              <a:t>7 / 14</a:t>
             </a:r>
             <a:endParaRPr lang="en-US" sz="900" dirty="0"/>
           </a:p>
@@ -9265,7 +8628,7 @@
 </p:sld>
 </file>
 
-<file path=ppt/slides/slide9.xml><?xml version="1.0" encoding="utf-8"?>
+<file path=ppt/slides/slide8.xml><?xml version="1.0" encoding="utf-8"?>
 <p:sld xmlns:a="http://schemas.openxmlformats.org/drawingml/2006/main" xmlns:r="http://schemas.openxmlformats.org/officeDocument/2006/relationships" xmlns:p="http://schemas.openxmlformats.org/presentationml/2006/main">
   <p:cSld name="Slide 9">
     <p:bg>
@@ -9447,7 +8810,7 @@
         </p:nvSpPr>
         <p:spPr>
           <a:xfrm>
-            <a:off x="457200" y="1965960"/>
+            <a:off x="457200" y="1881655"/>
             <a:ext cx="3977640" cy="1371600"/>
           </a:xfrm>
           <a:prstGeom prst="rect">
@@ -9479,7 +8842,7 @@
         </p:nvSpPr>
         <p:spPr>
           <a:xfrm>
-            <a:off x="457200" y="1965960"/>
+            <a:off x="457200" y="1881655"/>
             <a:ext cx="45720" cy="1371600"/>
           </a:xfrm>
           <a:prstGeom prst="rect">
@@ -9511,7 +8874,7 @@
         </p:nvSpPr>
         <p:spPr>
           <a:xfrm>
-            <a:off x="685800" y="2112264"/>
+            <a:off x="685800" y="2027959"/>
             <a:ext cx="3566160" cy="365760"/>
           </a:xfrm>
           <a:prstGeom prst="rect">
@@ -9550,7 +8913,7 @@
         </p:nvSpPr>
         <p:spPr>
           <a:xfrm>
-            <a:off x="685800" y="2496312"/>
+            <a:off x="685800" y="2412007"/>
             <a:ext cx="3566160" cy="749808"/>
           </a:xfrm>
           <a:prstGeom prst="rect">
@@ -9592,7 +8955,7 @@
         </p:nvSpPr>
         <p:spPr>
           <a:xfrm>
-            <a:off x="4709160" y="1965960"/>
+            <a:off x="4709160" y="1881655"/>
             <a:ext cx="3977640" cy="1371600"/>
           </a:xfrm>
           <a:prstGeom prst="rect">
@@ -9624,7 +8987,7 @@
         </p:nvSpPr>
         <p:spPr>
           <a:xfrm>
-            <a:off x="4709160" y="1965960"/>
+            <a:off x="4709160" y="1881655"/>
             <a:ext cx="45720" cy="1371600"/>
           </a:xfrm>
           <a:prstGeom prst="rect">
@@ -9656,7 +9019,7 @@
         </p:nvSpPr>
         <p:spPr>
           <a:xfrm>
-            <a:off x="4937760" y="2112264"/>
+            <a:off x="4937760" y="2027959"/>
             <a:ext cx="3566160" cy="365760"/>
           </a:xfrm>
           <a:prstGeom prst="rect">
@@ -9695,7 +9058,7 @@
         </p:nvSpPr>
         <p:spPr>
           <a:xfrm>
-            <a:off x="4937760" y="2496312"/>
+            <a:off x="4937760" y="2412007"/>
             <a:ext cx="3566160" cy="749808"/>
           </a:xfrm>
           <a:prstGeom prst="rect">
@@ -9723,7 +9086,7 @@
                 <a:ea typeface="DM Sans" pitchFamily="34" charset="-122"/>
                 <a:cs typeface="DM Sans" pitchFamily="34" charset="-120"/>
               </a:rPr>
-              <a:t>What employers are searching for at Tilburg right now — trending skills, sector demand, hot roles. Refreshed weekly.</a:t>
+              <a:t>What employers are searching for at Tilburg right now: trending skills, sector demand, hot roles. Refreshed weekly.</a:t>
             </a:r>
             <a:endParaRPr lang="en-US" sz="1100" dirty="0"/>
           </a:p>
@@ -9737,7 +9100,7 @@
         </p:nvSpPr>
         <p:spPr>
           <a:xfrm>
-            <a:off x="457200" y="3429000"/>
+            <a:off x="457200" y="3344695"/>
             <a:ext cx="3977640" cy="1371600"/>
           </a:xfrm>
           <a:prstGeom prst="rect">
@@ -9769,7 +9132,7 @@
         </p:nvSpPr>
         <p:spPr>
           <a:xfrm>
-            <a:off x="457200" y="3429000"/>
+            <a:off x="457200" y="3344695"/>
             <a:ext cx="45720" cy="1371600"/>
           </a:xfrm>
           <a:prstGeom prst="rect">
@@ -9801,7 +9164,7 @@
         </p:nvSpPr>
         <p:spPr>
           <a:xfrm>
-            <a:off x="685800" y="3575304"/>
+            <a:off x="685800" y="3490999"/>
             <a:ext cx="3566160" cy="365760"/>
           </a:xfrm>
           <a:prstGeom prst="rect">
@@ -9840,7 +9203,7 @@
         </p:nvSpPr>
         <p:spPr>
           <a:xfrm>
-            <a:off x="685800" y="3959352"/>
+            <a:off x="685800" y="3875047"/>
             <a:ext cx="3566160" cy="749808"/>
           </a:xfrm>
           <a:prstGeom prst="rect">
@@ -9882,7 +9245,7 @@
         </p:nvSpPr>
         <p:spPr>
           <a:xfrm>
-            <a:off x="4709160" y="3429000"/>
+            <a:off x="4709160" y="3344695"/>
             <a:ext cx="3977640" cy="1371600"/>
           </a:xfrm>
           <a:prstGeom prst="rect">
@@ -9914,7 +9277,7 @@
         </p:nvSpPr>
         <p:spPr>
           <a:xfrm>
-            <a:off x="4709160" y="3429000"/>
+            <a:off x="4709160" y="3344695"/>
             <a:ext cx="45720" cy="1371600"/>
           </a:xfrm>
           <a:prstGeom prst="rect">
@@ -9946,7 +9309,7 @@
         </p:nvSpPr>
         <p:spPr>
           <a:xfrm>
-            <a:off x="4937760" y="3575304"/>
+            <a:off x="4937760" y="3490999"/>
             <a:ext cx="3566160" cy="365760"/>
           </a:xfrm>
           <a:prstGeom prst="rect">
@@ -9985,7 +9348,7 @@
         </p:nvSpPr>
         <p:spPr>
           <a:xfrm>
-            <a:off x="4937760" y="3959352"/>
+            <a:off x="4937760" y="3875047"/>
             <a:ext cx="3566160" cy="749808"/>
           </a:xfrm>
           <a:prstGeom prst="rect">
@@ -10013,7 +9376,7 @@
                 <a:ea typeface="DM Sans" pitchFamily="34" charset="-122"/>
                 <a:cs typeface="DM Sans" pitchFamily="34" charset="-120"/>
               </a:rPr>
-              <a:t>Who's slipping, who's progressing, and where the team should focus outreach this week.</a:t>
+              <a:t>Who's slipping, who's progressing, and where the team should focus outreach this month.</a:t>
             </a:r>
             <a:endParaRPr lang="en-US" sz="1100" dirty="0"/>
           </a:p>
@@ -10052,7 +9415,7 @@
                 <a:ea typeface="DM Sans" pitchFamily="34" charset="-122"/>
                 <a:cs typeface="DM Sans" pitchFamily="34" charset="-120"/>
               </a:rPr>
-              <a:t>9 / 14</a:t>
+              <a:t>8 / 14</a:t>
             </a:r>
             <a:endParaRPr lang="en-US" sz="900" dirty="0"/>
           </a:p>
@@ -10101,6 +9464,302 @@
   </p:cSld>
   <p:clrMapOvr>
     <a:masterClrMapping/>
+  </p:clrMapOvr>
+</p:sld>
+</file>
+
+<file path=ppt/slides/slide9.xml><?xml version="1.0" encoding="utf-8"?>
+<p:sld xmlns:a="http://schemas.openxmlformats.org/drawingml/2006/main" xmlns:r="http://schemas.openxmlformats.org/officeDocument/2006/relationships" xmlns:p="http://schemas.openxmlformats.org/presentationml/2006/main">
+  <p:cSld>
+    <p:bg>
+      <p:bgPr>
+        <a:solidFill>
+          <a:srgbClr val="F7F4EF"/>
+        </a:solidFill>
+        <a:effectLst/>
+      </p:bgPr>
+    </p:bg>
+    <p:spTree>
+      <p:nvGrpSpPr>
+        <p:cNvPr id="1" name=""/>
+        <p:cNvGrpSpPr/>
+        <p:nvPr/>
+      </p:nvGrpSpPr>
+      <p:grpSpPr>
+        <a:xfrm>
+          <a:off x="0" y="0"/>
+          <a:ext cx="0" cy="0"/>
+          <a:chOff x="0" y="0"/>
+          <a:chExt cx="0" cy="0"/>
+        </a:xfrm>
+      </p:grpSpPr>
+      <p:sp>
+        <p:nvSpPr>
+          <p:cNvPr id="2" name="Shape 0"/>
+          <p:cNvSpPr/>
+          <p:nvPr/>
+        </p:nvSpPr>
+        <p:spPr>
+          <a:xfrm>
+            <a:off x="457200" y="530352"/>
+            <a:ext cx="73152" cy="73152"/>
+          </a:xfrm>
+          <a:prstGeom prst="ellipse">
+            <a:avLst/>
+          </a:prstGeom>
+          <a:solidFill>
+            <a:srgbClr val="E8622A"/>
+          </a:solidFill>
+          <a:ln w="12700">
+            <a:solidFill>
+              <a:srgbClr val="E8622A"/>
+            </a:solidFill>
+            <a:prstDash val="solid"/>
+          </a:ln>
+        </p:spPr>
+        <p:txBody>
+          <a:bodyPr/>
+          <a:lstStyle/>
+          <a:p>
+            <a:endParaRPr lang="en-US"/>
+          </a:p>
+        </p:txBody>
+      </p:sp>
+      <p:sp>
+        <p:nvSpPr>
+          <p:cNvPr id="3" name="Text 1"/>
+          <p:cNvSpPr/>
+          <p:nvPr/>
+        </p:nvSpPr>
+        <p:spPr>
+          <a:xfrm>
+            <a:off x="658368" y="457200"/>
+            <a:ext cx="4572000" cy="274320"/>
+          </a:xfrm>
+          <a:prstGeom prst="rect">
+            <a:avLst/>
+          </a:prstGeom>
+          <a:noFill/>
+          <a:ln/>
+        </p:spPr>
+        <p:txBody>
+          <a:bodyPr wrap="square" lIns="0" tIns="0" rIns="0" bIns="0" rtlCol="0" anchor="ctr"/>
+          <a:lstStyle/>
+          <a:p>
+            <a:pPr marL="0" indent="0">
+              <a:buNone/>
+            </a:pPr>
+            <a:r>
+              <a:rPr lang="en-US" sz="900" b="1" kern="0" spc="500" dirty="0">
+                <a:solidFill>
+                  <a:srgbClr val="8A8F9E"/>
+                </a:solidFill>
+                <a:latin typeface="DM Sans" pitchFamily="34" charset="0"/>
+                <a:ea typeface="DM Sans" pitchFamily="34" charset="-122"/>
+                <a:cs typeface="DM Sans" pitchFamily="34" charset="-120"/>
+              </a:rPr>
+              <a:t>08  ·  LIVE DEMO</a:t>
+            </a:r>
+            <a:endParaRPr lang="en-US" sz="900" dirty="0"/>
+          </a:p>
+        </p:txBody>
+      </p:sp>
+      <p:sp>
+        <p:nvSpPr>
+          <p:cNvPr id="4" name="Text 2"/>
+          <p:cNvSpPr/>
+          <p:nvPr/>
+        </p:nvSpPr>
+        <p:spPr>
+          <a:xfrm>
+            <a:off x="457200" y="664752"/>
+            <a:ext cx="8229600" cy="640080"/>
+          </a:xfrm>
+          <a:prstGeom prst="rect">
+            <a:avLst/>
+          </a:prstGeom>
+          <a:noFill/>
+          <a:ln/>
+        </p:spPr>
+        <p:txBody>
+          <a:bodyPr wrap="square" lIns="0" tIns="0" rIns="0" bIns="0" rtlCol="0" anchor="ctr"/>
+          <a:lstStyle/>
+          <a:p>
+            <a:pPr marL="0" indent="0">
+              <a:buNone/>
+            </a:pPr>
+            <a:r>
+              <a:rPr lang="en-US" sz="3000" dirty="0">
+                <a:solidFill>
+                  <a:srgbClr val="0F1F3D"/>
+                </a:solidFill>
+                <a:latin typeface="Playfair Display" pitchFamily="34" charset="0"/>
+                <a:ea typeface="Playfair Display" pitchFamily="34" charset="-122"/>
+                <a:cs typeface="Playfair Display" pitchFamily="34" charset="-120"/>
+              </a:rPr>
+              <a:t>Built, not (only) pitched.</a:t>
+            </a:r>
+            <a:endParaRPr lang="en-US" sz="3000" dirty="0"/>
+          </a:p>
+        </p:txBody>
+      </p:sp>
+      <p:sp>
+        <p:nvSpPr>
+          <p:cNvPr id="5" name="Text 3"/>
+          <p:cNvSpPr/>
+          <p:nvPr/>
+        </p:nvSpPr>
+        <p:spPr>
+          <a:xfrm>
+            <a:off x="5078538" y="801912"/>
+            <a:ext cx="3608262" cy="365760"/>
+          </a:xfrm>
+          <a:prstGeom prst="rect">
+            <a:avLst/>
+          </a:prstGeom>
+          <a:noFill/>
+          <a:ln/>
+        </p:spPr>
+        <p:txBody>
+          <a:bodyPr wrap="square" lIns="0" tIns="0" rIns="0" bIns="0" rtlCol="0" anchor="ctr"/>
+          <a:lstStyle/>
+          <a:p>
+            <a:pPr marL="0" indent="0">
+              <a:buNone/>
+            </a:pPr>
+            <a:r>
+              <a:rPr lang="en-US" sz="1000" i="1" dirty="0">
+                <a:solidFill>
+                  <a:srgbClr val="555B6E"/>
+                </a:solidFill>
+                <a:latin typeface="DM Sans" pitchFamily="34" charset="0"/>
+                <a:ea typeface="DM Sans" pitchFamily="34" charset="-122"/>
+                <a:cs typeface="DM Sans" pitchFamily="34" charset="-120"/>
+              </a:rPr>
+              <a:t>demo version</a:t>
+            </a:r>
+            <a:endParaRPr lang="en-US" sz="1000" dirty="0"/>
+          </a:p>
+        </p:txBody>
+      </p:sp>
+      <p:sp>
+        <p:nvSpPr>
+          <p:cNvPr id="11" name="Text 7"/>
+          <p:cNvSpPr/>
+          <p:nvPr/>
+        </p:nvSpPr>
+        <p:spPr>
+          <a:xfrm>
+            <a:off x="457200" y="4777740"/>
+            <a:ext cx="3657600" cy="228600"/>
+          </a:xfrm>
+          <a:prstGeom prst="rect">
+            <a:avLst/>
+          </a:prstGeom>
+          <a:noFill/>
+          <a:ln/>
+        </p:spPr>
+        <p:txBody>
+          <a:bodyPr wrap="square" lIns="0" tIns="0" rIns="0" bIns="0" rtlCol="0" anchor="ctr"/>
+          <a:lstStyle/>
+          <a:p>
+            <a:pPr marL="0" indent="0" algn="l">
+              <a:buNone/>
+            </a:pPr>
+            <a:r>
+              <a:rPr lang="en-US" sz="800" kern="0" spc="300" dirty="0">
+                <a:solidFill>
+                  <a:srgbClr val="8A8F9E"/>
+                </a:solidFill>
+                <a:latin typeface="DM Sans" pitchFamily="34" charset="0"/>
+                <a:ea typeface="DM Sans" pitchFamily="34" charset="-122"/>
+                <a:cs typeface="DM Sans" pitchFamily="34" charset="-120"/>
+              </a:rPr>
+              <a:t>ROOKIES  ·  PITCH  ·  2026</a:t>
+            </a:r>
+            <a:endParaRPr lang="en-US" sz="800" dirty="0"/>
+          </a:p>
+        </p:txBody>
+      </p:sp>
+      <p:pic>
+        <p:nvPicPr>
+          <p:cNvPr id="12" name="Picture 11">
+            <a:extLst>
+              <a:ext uri="{FF2B5EF4-FFF2-40B4-BE49-F238E27FC236}">
+                <a16:creationId xmlns:a16="http://schemas.microsoft.com/office/drawing/2014/main" id="{E550C94F-E0A4-4828-DD0D-2B573E1BF687}"/>
+              </a:ext>
+            </a:extLst>
+          </p:cNvPr>
+          <p:cNvPicPr>
+            <a:picLocks noChangeAspect="1"/>
+          </p:cNvPicPr>
+          <p:nvPr/>
+        </p:nvPicPr>
+        <p:blipFill>
+          <a:blip r:embed="rId4"/>
+          <a:stretch>
+            <a:fillRect/>
+          </a:stretch>
+        </p:blipFill>
+        <p:spPr>
+          <a:xfrm>
+            <a:off x="1544622" y="1265463"/>
+            <a:ext cx="6054756" cy="3337560"/>
+          </a:xfrm>
+          <a:prstGeom prst="rect">
+            <a:avLst/>
+          </a:prstGeom>
+        </p:spPr>
+      </p:pic>
+      <p:sp>
+        <p:nvSpPr>
+          <p:cNvPr id="15" name="Text 20">
+            <a:extLst>
+              <a:ext uri="{FF2B5EF4-FFF2-40B4-BE49-F238E27FC236}">
+                <a16:creationId xmlns:a16="http://schemas.microsoft.com/office/drawing/2014/main" id="{1B193309-E44B-788C-DBAC-B693EBB1DCE6}"/>
+              </a:ext>
+            </a:extLst>
+          </p:cNvPr>
+          <p:cNvSpPr/>
+          <p:nvPr/>
+        </p:nvSpPr>
+        <p:spPr>
+          <a:xfrm>
+            <a:off x="8275320" y="4777740"/>
+            <a:ext cx="777240" cy="228600"/>
+          </a:xfrm>
+          <a:prstGeom prst="rect">
+            <a:avLst/>
+          </a:prstGeom>
+          <a:noFill/>
+          <a:ln/>
+        </p:spPr>
+        <p:txBody>
+          <a:bodyPr wrap="square" lIns="0" tIns="0" rIns="0" bIns="0" rtlCol="0" anchor="ctr"/>
+          <a:lstStyle/>
+          <a:p>
+            <a:pPr marL="0" indent="0" algn="r">
+              <a:buNone/>
+            </a:pPr>
+            <a:r>
+              <a:rPr lang="en-US" sz="900" dirty="0">
+                <a:solidFill>
+                  <a:srgbClr val="8A8F9E"/>
+                </a:solidFill>
+                <a:latin typeface="DM Sans" pitchFamily="34" charset="0"/>
+                <a:ea typeface="DM Sans" pitchFamily="34" charset="-122"/>
+                <a:cs typeface="DM Sans" pitchFamily="34" charset="-120"/>
+              </a:rPr>
+              <a:t>9 / 14</a:t>
+            </a:r>
+            <a:endParaRPr lang="en-US" sz="900" dirty="0"/>
+          </a:p>
+        </p:txBody>
+      </p:sp>
+    </p:spTree>
+  </p:cSld>
+  <p:clrMapOvr>
+    <a:overrideClrMapping bg1="lt1" tx1="dk1" bg2="lt2" tx2="dk2" accent1="accent1" accent2="accent2" accent3="accent3" accent4="accent4" accent5="accent5" accent6="accent6" hlink="hlink" folHlink="folHlink"/>
   </p:clrMapOvr>
 </p:sld>
 </file>
@@ -10713,4 +10372,90 @@
     </a:ext>
   </a:extLst>
 </a:theme>
+</file>
+
+<file path=ppt/theme/themeOverride1.xml><?xml version="1.0" encoding="utf-8"?>
+<a:themeOverride xmlns:a="http://schemas.openxmlformats.org/drawingml/2006/main">
+  <a:clrScheme name="Office">
+    <a:dk1>
+      <a:sysClr val="windowText" lastClr="000000"/>
+    </a:dk1>
+    <a:lt1>
+      <a:sysClr val="window" lastClr="FFFFFF"/>
+    </a:lt1>
+    <a:dk2>
+      <a:srgbClr val="44546A"/>
+    </a:dk2>
+    <a:lt2>
+      <a:srgbClr val="E7E6E6"/>
+    </a:lt2>
+    <a:accent1>
+      <a:srgbClr val="4472C4"/>
+    </a:accent1>
+    <a:accent2>
+      <a:srgbClr val="ED7D31"/>
+    </a:accent2>
+    <a:accent3>
+      <a:srgbClr val="A5A5A5"/>
+    </a:accent3>
+    <a:accent4>
+      <a:srgbClr val="FFC000"/>
+    </a:accent4>
+    <a:accent5>
+      <a:srgbClr val="5B9BD5"/>
+    </a:accent5>
+    <a:accent6>
+      <a:srgbClr val="70AD47"/>
+    </a:accent6>
+    <a:hlink>
+      <a:srgbClr val="0563C1"/>
+    </a:hlink>
+    <a:folHlink>
+      <a:srgbClr val="954F72"/>
+    </a:folHlink>
+  </a:clrScheme>
+</a:themeOverride>
+</file>
+
+<file path=ppt/theme/themeOverride2.xml><?xml version="1.0" encoding="utf-8"?>
+<a:themeOverride xmlns:a="http://schemas.openxmlformats.org/drawingml/2006/main">
+  <a:clrScheme name="Office">
+    <a:dk1>
+      <a:sysClr val="windowText" lastClr="000000"/>
+    </a:dk1>
+    <a:lt1>
+      <a:sysClr val="window" lastClr="FFFFFF"/>
+    </a:lt1>
+    <a:dk2>
+      <a:srgbClr val="44546A"/>
+    </a:dk2>
+    <a:lt2>
+      <a:srgbClr val="E7E6E6"/>
+    </a:lt2>
+    <a:accent1>
+      <a:srgbClr val="4472C4"/>
+    </a:accent1>
+    <a:accent2>
+      <a:srgbClr val="ED7D31"/>
+    </a:accent2>
+    <a:accent3>
+      <a:srgbClr val="A5A5A5"/>
+    </a:accent3>
+    <a:accent4>
+      <a:srgbClr val="FFC000"/>
+    </a:accent4>
+    <a:accent5>
+      <a:srgbClr val="5B9BD5"/>
+    </a:accent5>
+    <a:accent6>
+      <a:srgbClr val="70AD47"/>
+    </a:accent6>
+    <a:hlink>
+      <a:srgbClr val="0563C1"/>
+    </a:hlink>
+    <a:folHlink>
+      <a:srgbClr val="954F72"/>
+    </a:folHlink>
+  </a:clrScheme>
+</a:themeOverride>
 </file>